--- a/thesis/presentations/chapter03_defence.pptx
+++ b/thesis/presentations/chapter03_defence.pptx
@@ -186,7 +186,7 @@
                   <c:v>0.9155875</c:v>
                 </c:pt>
                 <c:pt idx="2">
-                  <c:v>0.914925</c:v>
+                  <c:v>0.9153249999999999</c:v>
                 </c:pt>
                 <c:pt idx="3">
                   <c:v>0.8828625</c:v>
@@ -10502,7 +10502,7 @@
                 </a:solidFill>
                 <a:latin typeface="Calibri"/>
               </a:rPr>
-              <a:t>On classification the forest leads, best on 7 of 8, losing AChE to histogram gradient boosting at 0.9148 against 0.9241.</a:t>
+              <a:t>On classification the forest leads, best on 7 of 8, losing AChE to histogram gradient boosting at 0.9148 against 0.9247.</a:t>
             </a:r>
           </a:p>
         </p:txBody>
@@ -11965,7 +11965,7 @@
                 </a:solidFill>
                 <a:latin typeface="Calibri"/>
               </a:rPr>
-              <a:t>+0.0031</a:t>
+              <a:t>+0.0026</a:t>
             </a:r>
           </a:p>
         </p:txBody>
@@ -12004,7 +12004,7 @@
                 </a:solidFill>
                 <a:latin typeface="Calibri"/>
               </a:rPr>
-              <a:t>-0.0051</a:t>
+              <a:t>-0.0054</a:t>
             </a:r>
           </a:p>
         </p:txBody>
@@ -12477,7 +12477,7 @@
                 </a:solidFill>
                 <a:latin typeface="Calibri"/>
               </a:rPr>
-              <a:t>+0.0045</a:t>
+              <a:t>+0.0049</a:t>
             </a:r>
           </a:p>
         </p:txBody>
@@ -12516,7 +12516,7 @@
                 </a:solidFill>
                 <a:latin typeface="Calibri"/>
               </a:rPr>
-              <a:t>+0.0063</a:t>
+              <a:t>+0.0059</a:t>
             </a:r>
           </a:p>
         </p:txBody>
